--- a/classes/parte-3-hacking-etico-y-pentesting-metodologia/085-reporte-profesional-de-pentest/clase-085-presentacion.pptx
+++ b/classes/parte-3-hacking-etico-y-pentesting-metodologia/085-reporte-profesional-de-pentest/clase-085-presentacion.pptx
@@ -17,6 +17,9 @@
     <p:sldId id="265" r:id="rId16"/>
     <p:sldId id="266" r:id="rId17"/>
     <p:sldId id="267" r:id="rId18"/>
+    <p:sldId id="268" r:id="rId19"/>
+    <p:sldId id="269" r:id="rId20"/>
+    <p:sldId id="270" r:id="rId21"/>
   </p:sldIdLst>
   <p:sldSz cx="9144000" cy="6858000" type="screen4x3"/>
   <p:notesSz cx="6858000" cy="9144000"/>
@@ -3198,7 +3201,7 @@
                   <a:srgbClr val="0B3D2E"/>
                 </a:solidFill>
               </a:rPr>
-              <a:t>⚠️ Errores comunes</a:t>
+              <a:t>✍️ Ejercicios</a:t>
             </a:r>
           </a:p>
         </p:txBody>
@@ -3236,82 +3239,67 @@
                   <a:srgbClr val="22282E"/>
                 </a:solidFill>
               </a:rPr>
-              <a:t>•  Resumen ejecutivo lleno de comandos y CVEs — La dirección no lo entiende. Reescríbelo en lenguaje de impacto de negocio.</a:t>
-            </a:r>
-          </a:p>
-          <a:p>
-            <a:pPr>
-              <a:spcAft>
-                <a:spcPts val="600"/>
-              </a:spcAft>
-            </a:pPr>
-            <a:r>
-              <a:rPr sz="1500">
-                <a:solidFill>
-                  <a:srgbClr val="22282E"/>
-                </a:solidFill>
-              </a:rPr>
-              <a:t>•  Pegar la salida cruda de un escáner como "hallazgos" — Genera falsos positivos y desconfianza. Valida y contextualiza cada uno manualmente.</a:t>
-            </a:r>
-          </a:p>
-          <a:p>
-            <a:pPr>
-              <a:spcAft>
-                <a:spcPts val="600"/>
-              </a:spcAft>
-            </a:pPr>
-            <a:r>
-              <a:rPr sz="1500">
-                <a:solidFill>
-                  <a:srgbClr val="22282E"/>
-                </a:solidFill>
-              </a:rPr>
-              <a:t>•  Capturas ilegibles o sin anotar — El cliente no ve el punto. Recorta, resalta y explica cada evidencia.</a:t>
-            </a:r>
-          </a:p>
-          <a:p>
-            <a:pPr>
-              <a:spcAft>
-                <a:spcPts val="600"/>
-              </a:spcAft>
-            </a:pPr>
-            <a:r>
-              <a:rPr sz="1500">
-                <a:solidFill>
-                  <a:srgbClr val="22282E"/>
-                </a:solidFill>
-              </a:rPr>
-              <a:t>•  Recomendaciones genéricas — "Aplicar parches" no ayuda. Sé específico: qué versión, qué configuración, qué línea.</a:t>
-            </a:r>
-          </a:p>
-          <a:p>
-            <a:pPr>
-              <a:spcAft>
-                <a:spcPts val="600"/>
-              </a:spcAft>
-            </a:pPr>
-            <a:r>
-              <a:rPr sz="1500">
-                <a:solidFill>
-                  <a:srgbClr val="22282E"/>
-                </a:solidFill>
-              </a:rPr>
-              <a:t>•  Priorizar solo por CVSS bruto — Un CVSS 9 en un entorno aislado importa menos que un 6 en el core expuesto. Ajusta al contexto.</a:t>
-            </a:r>
-          </a:p>
-          <a:p>
-            <a:pPr>
-              <a:spcAft>
-                <a:spcPts val="600"/>
-              </a:spcAft>
-            </a:pPr>
-            <a:r>
-              <a:rPr sz="1500">
-                <a:solidFill>
-                  <a:srgbClr val="22282E"/>
-                </a:solidFill>
-              </a:rPr>
-              <a:t>•  No planificar el retest — Sin verificación, no sabes si el riesgo se cerró. Inclúyelo en el alcance.</a:t>
+              <a:t>•  Escribe un resumen ejecutivo de 200 palabras para una audiencia no técnica a partir de 3 hallazgos.</a:t>
+            </a:r>
+          </a:p>
+          <a:p>
+            <a:pPr>
+              <a:spcAft>
+                <a:spcPts val="600"/>
+              </a:spcAft>
+            </a:pPr>
+            <a:r>
+              <a:rPr sz="1500">
+                <a:solidFill>
+                  <a:srgbClr val="22282E"/>
+                </a:solidFill>
+              </a:rPr>
+              <a:t>•  Calcula el CVSS v3.1 de una SQLi no autenticada expuesta a internet y justifica cada métrica.</a:t>
+            </a:r>
+          </a:p>
+          <a:p>
+            <a:pPr>
+              <a:spcAft>
+                <a:spcPts val="600"/>
+              </a:spcAft>
+            </a:pPr>
+            <a:r>
+              <a:rPr sz="1500">
+                <a:solidFill>
+                  <a:srgbClr val="22282E"/>
+                </a:solidFill>
+              </a:rPr>
+              <a:t>•  Reescribe una recomendación genérica ("mejorar la seguridad") en una accionable y específica.</a:t>
+            </a:r>
+          </a:p>
+          <a:p>
+            <a:pPr>
+              <a:spcAft>
+                <a:spcPts val="600"/>
+              </a:spcAft>
+            </a:pPr>
+            <a:r>
+              <a:rPr sz="1500">
+                <a:solidFill>
+                  <a:srgbClr val="22282E"/>
+                </a:solidFill>
+              </a:rPr>
+              <a:t>•  Toma una captura de pantalla de una prueba y anótala (resaltar el dato clave) para que sea autoexplicativa.</a:t>
+            </a:r>
+          </a:p>
+          <a:p>
+            <a:pPr>
+              <a:spcAft>
+                <a:spcPts val="600"/>
+              </a:spcAft>
+            </a:pPr>
+            <a:r>
+              <a:rPr sz="1500">
+                <a:solidFill>
+                  <a:srgbClr val="22282E"/>
+                </a:solidFill>
+              </a:rPr>
+              <a:t>•  Diseña la tabla resumen de hallazgos (título, severidad, estado) para la primera página técnica.</a:t>
             </a:r>
           </a:p>
         </p:txBody>
@@ -3362,7 +3350,7 @@
                   <a:srgbClr val="0B3D2E"/>
                 </a:solidFill>
               </a:rPr>
-              <a:t>❓ Preguntas frecuentes</a:t>
+              <a:t>📝 Reto verificable</a:t>
             </a:r>
           </a:p>
         </p:txBody>
@@ -3400,97 +3388,22 @@
                   <a:srgbClr val="22282E"/>
                 </a:solidFill>
               </a:rPr>
-              <a:t>•  ❓ ¿Qué es lo más importante del informe?</a:t>
-            </a:r>
-          </a:p>
-          <a:p>
-            <a:pPr>
-              <a:spcAft>
-                <a:spcPts val="600"/>
-              </a:spcAft>
-            </a:pPr>
-            <a:r>
-              <a:rPr sz="1500">
-                <a:solidFill>
-                  <a:srgbClr val="22282E"/>
-                </a:solidFill>
-              </a:rPr>
-              <a:t>•  El resumen ejecutivo y la calidad/priorización de los hallazgos. Es lo que decide si la organización actúa.</a:t>
-            </a:r>
-          </a:p>
-          <a:p>
-            <a:pPr>
-              <a:spcAft>
-                <a:spcPts val="600"/>
-              </a:spcAft>
-            </a:pPr>
-            <a:r>
-              <a:rPr sz="1500">
-                <a:solidFill>
-                  <a:srgbClr val="22282E"/>
-                </a:solidFill>
-              </a:rPr>
-              <a:t>•  ❓ ¿CVSS es suficiente para priorizar?</a:t>
-            </a:r>
-          </a:p>
-          <a:p>
-            <a:pPr>
-              <a:spcAft>
-                <a:spcPts val="600"/>
-              </a:spcAft>
-            </a:pPr>
-            <a:r>
-              <a:rPr sz="1500">
-                <a:solidFill>
-                  <a:srgbClr val="22282E"/>
-                </a:solidFill>
-              </a:rPr>
-              <a:t>•  No. Es una base objetiva, pero hay que ajustarla con exposición real, valor del activo y controles compensatorios del cliente.</a:t>
-            </a:r>
-          </a:p>
-          <a:p>
-            <a:pPr>
-              <a:spcAft>
-                <a:spcPts val="600"/>
-              </a:spcAft>
-            </a:pPr>
-            <a:r>
-              <a:rPr sz="1500">
-                <a:solidFill>
-                  <a:srgbClr val="22282E"/>
-                </a:solidFill>
-              </a:rPr>
-              <a:t>•  ❓ ¿Debo incluir los hallazgos "informativos" o de bajo riesgo?</a:t>
-            </a:r>
-          </a:p>
-          <a:p>
-            <a:pPr>
-              <a:spcAft>
-                <a:spcPts val="600"/>
-              </a:spcAft>
-            </a:pPr>
-            <a:r>
-              <a:rPr sz="1500">
-                <a:solidFill>
-                  <a:srgbClr val="22282E"/>
-                </a:solidFill>
-              </a:rPr>
-              <a:t>•  Sí, en un anexo. Aportan valor sin inflar la lista crítica, y muestran la profundidad del trabajo.</a:t>
-            </a:r>
-          </a:p>
-          <a:p>
-            <a:pPr>
-              <a:spcAft>
-                <a:spcPts val="600"/>
-              </a:spcAft>
-            </a:pPr>
-            <a:r>
-              <a:rPr sz="1500">
-                <a:solidFill>
-                  <a:srgbClr val="22282E"/>
-                </a:solidFill>
-              </a:rPr>
-              <a:t>•  ❓ ¿El informe es el final del engagement?</a:t>
+              <a:t>•  Redacta un mini-informe (resumen ejecutivo + 2 hallazgos completos + tabla de priorización) sobre vulnerabilidades encontradas en tu propio laboratorio.</a:t>
+            </a:r>
+          </a:p>
+          <a:p>
+            <a:pPr>
+              <a:spcAft>
+                <a:spcPts val="600"/>
+              </a:spcAft>
+            </a:pPr>
+            <a:r>
+              <a:rPr sz="1500">
+                <a:solidFill>
+                  <a:srgbClr val="22282E"/>
+                </a:solidFill>
+              </a:rPr>
+              <a:t>•  Criterio de aceptación: el resumen ejecutivo no contiene jerga técnica; cada hallazgo tiene CVSS justificado, evidencia reproducible y remediación específica con referencia; la priorización considera…</a:t>
             </a:r>
           </a:p>
         </p:txBody>
@@ -3541,7 +3454,7 @@
                   <a:srgbClr val="0B3D2E"/>
                 </a:solidFill>
               </a:rPr>
-              <a:t>🔗 Referencias</a:t>
+              <a:t>⚠️ Errores comunes</a:t>
             </a:r>
           </a:p>
         </p:txBody>
@@ -3579,6 +3492,349 @@
                   <a:srgbClr val="22282E"/>
                 </a:solidFill>
               </a:rPr>
+              <a:t>•  Resumen ejecutivo lleno de comandos y CVEs — La dirección no lo entiende. Reescríbelo en lenguaje de impacto de negocio.</a:t>
+            </a:r>
+          </a:p>
+          <a:p>
+            <a:pPr>
+              <a:spcAft>
+                <a:spcPts val="600"/>
+              </a:spcAft>
+            </a:pPr>
+            <a:r>
+              <a:rPr sz="1500">
+                <a:solidFill>
+                  <a:srgbClr val="22282E"/>
+                </a:solidFill>
+              </a:rPr>
+              <a:t>•  Pegar la salida cruda de un escáner como "hallazgos" — Genera falsos positivos y desconfianza. Valida y contextualiza cada uno manualmente.</a:t>
+            </a:r>
+          </a:p>
+          <a:p>
+            <a:pPr>
+              <a:spcAft>
+                <a:spcPts val="600"/>
+              </a:spcAft>
+            </a:pPr>
+            <a:r>
+              <a:rPr sz="1500">
+                <a:solidFill>
+                  <a:srgbClr val="22282E"/>
+                </a:solidFill>
+              </a:rPr>
+              <a:t>•  Capturas ilegibles o sin anotar — El cliente no ve el punto. Recorta, resalta y explica cada evidencia.</a:t>
+            </a:r>
+          </a:p>
+          <a:p>
+            <a:pPr>
+              <a:spcAft>
+                <a:spcPts val="600"/>
+              </a:spcAft>
+            </a:pPr>
+            <a:r>
+              <a:rPr sz="1500">
+                <a:solidFill>
+                  <a:srgbClr val="22282E"/>
+                </a:solidFill>
+              </a:rPr>
+              <a:t>•  Recomendaciones genéricas — "Aplicar parches" no ayuda. Sé específico: qué versión, qué configuración, qué línea.</a:t>
+            </a:r>
+          </a:p>
+          <a:p>
+            <a:pPr>
+              <a:spcAft>
+                <a:spcPts val="600"/>
+              </a:spcAft>
+            </a:pPr>
+            <a:r>
+              <a:rPr sz="1500">
+                <a:solidFill>
+                  <a:srgbClr val="22282E"/>
+                </a:solidFill>
+              </a:rPr>
+              <a:t>•  Priorizar solo por CVSS bruto — Un CVSS 9 en un entorno aislado importa menos que un 6 en el core expuesto. Ajusta al contexto.</a:t>
+            </a:r>
+          </a:p>
+          <a:p>
+            <a:pPr>
+              <a:spcAft>
+                <a:spcPts val="600"/>
+              </a:spcAft>
+            </a:pPr>
+            <a:r>
+              <a:rPr sz="1500">
+                <a:solidFill>
+                  <a:srgbClr val="22282E"/>
+                </a:solidFill>
+              </a:rPr>
+              <a:t>•  No planificar el retest — Sin verificación, no sabes si el riesgo se cerró. Inclúyelo en el alcance.</a:t>
+            </a:r>
+          </a:p>
+        </p:txBody>
+      </p:sp>
+    </p:spTree>
+  </p:cSld>
+  <p:clrMapOvr>
+    <a:masterClrMapping/>
+  </p:clrMapOvr>
+</p:sld>
+</file>
+
+<file path=ppt/slides/slide13.xml><?xml version="1.0" encoding="utf-8"?>
+<p:sld xmlns:a="http://schemas.openxmlformats.org/drawingml/2006/main" xmlns:p="http://schemas.openxmlformats.org/presentationml/2006/main" xmlns:r="http://schemas.openxmlformats.org/officeDocument/2006/relationships">
+  <p:cSld>
+    <p:spTree>
+      <p:nvGrpSpPr>
+        <p:cNvPr id="1" name=""/>
+        <p:cNvGrpSpPr/>
+        <p:nvPr/>
+      </p:nvGrpSpPr>
+      <p:grpSpPr/>
+      <p:sp>
+        <p:nvSpPr>
+          <p:cNvPr id="2" name="TextBox 1"/>
+          <p:cNvSpPr txBox="1"/>
+          <p:nvPr/>
+        </p:nvSpPr>
+        <p:spPr>
+          <a:xfrm>
+            <a:off x="457200" y="320040"/>
+            <a:ext cx="8229600" cy="822960"/>
+          </a:xfrm>
+          <a:prstGeom prst="rect">
+            <a:avLst/>
+          </a:prstGeom>
+          <a:noFill/>
+        </p:spPr>
+        <p:txBody>
+          <a:bodyPr wrap="square">
+            <a:spAutoFit/>
+          </a:bodyPr>
+          <a:lstStyle/>
+          <a:p>
+            <a:r>
+              <a:rPr sz="2600" b="1">
+                <a:solidFill>
+                  <a:srgbClr val="0B3D2E"/>
+                </a:solidFill>
+              </a:rPr>
+              <a:t>❓ Preguntas frecuentes</a:t>
+            </a:r>
+          </a:p>
+        </p:txBody>
+      </p:sp>
+      <p:sp>
+        <p:nvSpPr>
+          <p:cNvPr id="3" name="TextBox 2"/>
+          <p:cNvSpPr txBox="1"/>
+          <p:nvPr/>
+        </p:nvSpPr>
+        <p:spPr>
+          <a:xfrm>
+            <a:off x="457200" y="1280160"/>
+            <a:ext cx="8229600" cy="4937760"/>
+          </a:xfrm>
+          <a:prstGeom prst="rect">
+            <a:avLst/>
+          </a:prstGeom>
+          <a:noFill/>
+        </p:spPr>
+        <p:txBody>
+          <a:bodyPr wrap="square">
+            <a:spAutoFit/>
+          </a:bodyPr>
+          <a:lstStyle/>
+          <a:p>
+            <a:pPr>
+              <a:spcAft>
+                <a:spcPts val="600"/>
+              </a:spcAft>
+            </a:pPr>
+            <a:r>
+              <a:rPr sz="1500">
+                <a:solidFill>
+                  <a:srgbClr val="22282E"/>
+                </a:solidFill>
+              </a:rPr>
+              <a:t>•  ❓ ¿Qué es lo más importante del informe?</a:t>
+            </a:r>
+          </a:p>
+          <a:p>
+            <a:pPr>
+              <a:spcAft>
+                <a:spcPts val="600"/>
+              </a:spcAft>
+            </a:pPr>
+            <a:r>
+              <a:rPr sz="1500">
+                <a:solidFill>
+                  <a:srgbClr val="22282E"/>
+                </a:solidFill>
+              </a:rPr>
+              <a:t>•  El resumen ejecutivo y la calidad/priorización de los hallazgos. Es lo que decide si la organización actúa.</a:t>
+            </a:r>
+          </a:p>
+          <a:p>
+            <a:pPr>
+              <a:spcAft>
+                <a:spcPts val="600"/>
+              </a:spcAft>
+            </a:pPr>
+            <a:r>
+              <a:rPr sz="1500">
+                <a:solidFill>
+                  <a:srgbClr val="22282E"/>
+                </a:solidFill>
+              </a:rPr>
+              <a:t>•  ❓ ¿CVSS es suficiente para priorizar?</a:t>
+            </a:r>
+          </a:p>
+          <a:p>
+            <a:pPr>
+              <a:spcAft>
+                <a:spcPts val="600"/>
+              </a:spcAft>
+            </a:pPr>
+            <a:r>
+              <a:rPr sz="1500">
+                <a:solidFill>
+                  <a:srgbClr val="22282E"/>
+                </a:solidFill>
+              </a:rPr>
+              <a:t>•  No. Es una base objetiva, pero hay que ajustarla con exposición real, valor del activo y controles compensatorios del cliente.</a:t>
+            </a:r>
+          </a:p>
+          <a:p>
+            <a:pPr>
+              <a:spcAft>
+                <a:spcPts val="600"/>
+              </a:spcAft>
+            </a:pPr>
+            <a:r>
+              <a:rPr sz="1500">
+                <a:solidFill>
+                  <a:srgbClr val="22282E"/>
+                </a:solidFill>
+              </a:rPr>
+              <a:t>•  ❓ ¿Debo incluir los hallazgos "informativos" o de bajo riesgo?</a:t>
+            </a:r>
+          </a:p>
+          <a:p>
+            <a:pPr>
+              <a:spcAft>
+                <a:spcPts val="600"/>
+              </a:spcAft>
+            </a:pPr>
+            <a:r>
+              <a:rPr sz="1500">
+                <a:solidFill>
+                  <a:srgbClr val="22282E"/>
+                </a:solidFill>
+              </a:rPr>
+              <a:t>•  Sí, en un anexo. Aportan valor sin inflar la lista crítica, y muestran la profundidad del trabajo.</a:t>
+            </a:r>
+          </a:p>
+          <a:p>
+            <a:pPr>
+              <a:spcAft>
+                <a:spcPts val="600"/>
+              </a:spcAft>
+            </a:pPr>
+            <a:r>
+              <a:rPr sz="1500">
+                <a:solidFill>
+                  <a:srgbClr val="22282E"/>
+                </a:solidFill>
+              </a:rPr>
+              <a:t>•  ❓ ¿El informe es el final del engagement?</a:t>
+            </a:r>
+          </a:p>
+        </p:txBody>
+      </p:sp>
+    </p:spTree>
+  </p:cSld>
+  <p:clrMapOvr>
+    <a:masterClrMapping/>
+  </p:clrMapOvr>
+</p:sld>
+</file>
+
+<file path=ppt/slides/slide14.xml><?xml version="1.0" encoding="utf-8"?>
+<p:sld xmlns:a="http://schemas.openxmlformats.org/drawingml/2006/main" xmlns:p="http://schemas.openxmlformats.org/presentationml/2006/main" xmlns:r="http://schemas.openxmlformats.org/officeDocument/2006/relationships">
+  <p:cSld>
+    <p:spTree>
+      <p:nvGrpSpPr>
+        <p:cNvPr id="1" name=""/>
+        <p:cNvGrpSpPr/>
+        <p:nvPr/>
+      </p:nvGrpSpPr>
+      <p:grpSpPr/>
+      <p:sp>
+        <p:nvSpPr>
+          <p:cNvPr id="2" name="TextBox 1"/>
+          <p:cNvSpPr txBox="1"/>
+          <p:nvPr/>
+        </p:nvSpPr>
+        <p:spPr>
+          <a:xfrm>
+            <a:off x="457200" y="320040"/>
+            <a:ext cx="8229600" cy="822960"/>
+          </a:xfrm>
+          <a:prstGeom prst="rect">
+            <a:avLst/>
+          </a:prstGeom>
+          <a:noFill/>
+        </p:spPr>
+        <p:txBody>
+          <a:bodyPr wrap="square">
+            <a:spAutoFit/>
+          </a:bodyPr>
+          <a:lstStyle/>
+          <a:p>
+            <a:r>
+              <a:rPr sz="2600" b="1">
+                <a:solidFill>
+                  <a:srgbClr val="0B3D2E"/>
+                </a:solidFill>
+              </a:rPr>
+              <a:t>🔗 Referencias</a:t>
+            </a:r>
+          </a:p>
+        </p:txBody>
+      </p:sp>
+      <p:sp>
+        <p:nvSpPr>
+          <p:cNvPr id="3" name="TextBox 2"/>
+          <p:cNvSpPr txBox="1"/>
+          <p:nvPr/>
+        </p:nvSpPr>
+        <p:spPr>
+          <a:xfrm>
+            <a:off x="457200" y="1280160"/>
+            <a:ext cx="8229600" cy="4937760"/>
+          </a:xfrm>
+          <a:prstGeom prst="rect">
+            <a:avLst/>
+          </a:prstGeom>
+          <a:noFill/>
+        </p:spPr>
+        <p:txBody>
+          <a:bodyPr wrap="square">
+            <a:spAutoFit/>
+          </a:bodyPr>
+          <a:lstStyle/>
+          <a:p>
+            <a:pPr>
+              <a:spcAft>
+                <a:spcPts val="600"/>
+              </a:spcAft>
+            </a:pPr>
+            <a:r>
+              <a:rPr sz="1500">
+                <a:solidFill>
+                  <a:srgbClr val="22282E"/>
+                </a:solidFill>
+              </a:rPr>
               <a:t>•  PTES — Reporting</a:t>
             </a:r>
           </a:p>
@@ -3629,6 +3885,81 @@
           </a:p>
         </p:txBody>
       </p:sp>
+    </p:spTree>
+  </p:cSld>
+  <p:clrMapOvr>
+    <a:masterClrMapping/>
+  </p:clrMapOvr>
+</p:sld>
+</file>
+
+<file path=ppt/slides/slide15.xml><?xml version="1.0" encoding="utf-8"?>
+<p:sld xmlns:a="http://schemas.openxmlformats.org/drawingml/2006/main" xmlns:p="http://schemas.openxmlformats.org/presentationml/2006/main" xmlns:r="http://schemas.openxmlformats.org/officeDocument/2006/relationships">
+  <p:cSld>
+    <p:spTree>
+      <p:nvGrpSpPr>
+        <p:cNvPr id="1" name=""/>
+        <p:cNvGrpSpPr/>
+        <p:nvPr/>
+      </p:nvGrpSpPr>
+      <p:grpSpPr/>
+      <p:sp>
+        <p:nvSpPr>
+          <p:cNvPr id="2" name="TextBox 1"/>
+          <p:cNvSpPr txBox="1"/>
+          <p:nvPr/>
+        </p:nvSpPr>
+        <p:spPr>
+          <a:xfrm>
+            <a:off x="457200" y="274320"/>
+            <a:ext cx="8229600" cy="640080"/>
+          </a:xfrm>
+          <a:prstGeom prst="rect">
+            <a:avLst/>
+          </a:prstGeom>
+          <a:noFill/>
+        </p:spPr>
+        <p:txBody>
+          <a:bodyPr wrap="square">
+            <a:spAutoFit/>
+          </a:bodyPr>
+          <a:lstStyle/>
+          <a:p>
+            <a:r>
+              <a:rPr sz="2200" b="1">
+                <a:solidFill>
+                  <a:srgbClr val="0B3D2E"/>
+                </a:solidFill>
+              </a:rPr>
+              <a:t>Diagrama de la clase</a:t>
+            </a:r>
+          </a:p>
+        </p:txBody>
+      </p:sp>
+      <p:pic>
+        <p:nvPicPr>
+          <p:cNvPr id="3" name="Picture 2" descr="dd6e0e165236bd2e.png"/>
+          <p:cNvPicPr>
+            <a:picLocks noChangeAspect="1"/>
+          </p:cNvPicPr>
+          <p:nvPr/>
+        </p:nvPicPr>
+        <p:blipFill>
+          <a:blip r:embed="rId2"/>
+          <a:stretch>
+            <a:fillRect/>
+          </a:stretch>
+        </p:blipFill>
+        <p:spPr>
+          <a:xfrm>
+            <a:off x="2148482" y="1097280"/>
+            <a:ext cx="4847035" cy="5303519"/>
+          </a:xfrm>
+          <a:prstGeom prst="rect">
+            <a:avLst/>
+          </a:prstGeom>
+        </p:spPr>
+      </p:pic>
     </p:spTree>
   </p:cSld>
   <p:clrMapOvr>
@@ -3713,7 +4044,7 @@
                   <a:srgbClr val="22282E"/>
                 </a:solidFill>
               </a:rPr>
-              <a:t>•  Aprender a convertir un engagement técnico en un entregable de valor: un informe que la dirección entiende y el equipo técnico puede accionar. El reporte es el producto final por el que paga el cliente; un hallazgo brillante mal comunicado no se arregla nunca. Cubrimos estructura, priorización por riesgo (CVSS + contexto de negocio), evidencia reproducible y recomendaciones accionables.</a:t>
+              <a:t>•  Aprender a convertir un engagement técnico en un entregable de valor: un informe que la dirección entiende y el equipo técnico puede accionar. El reporte es el producto final por el que paga el…</a:t>
             </a:r>
           </a:p>
         </p:txBody>
@@ -4107,7 +4438,7 @@
                   <a:srgbClr val="0B3D2E"/>
                 </a:solidFill>
               </a:rPr>
-              <a:t>📖 Definiciones y características</a:t>
+              <a:t>🧠 Explicación en profundidad</a:t>
             </a:r>
           </a:p>
         </p:txBody>
@@ -4145,97 +4476,97 @@
                   <a:srgbClr val="22282E"/>
                 </a:solidFill>
               </a:rPr>
-              <a:t>•  Resumen ejecutivo</a:t>
-            </a:r>
-          </a:p>
-          <a:p>
-            <a:pPr>
-              <a:spcAft>
-                <a:spcPts val="600"/>
-              </a:spcAft>
-            </a:pPr>
-            <a:r>
-              <a:rPr sz="1500">
-                <a:solidFill>
-                  <a:srgbClr val="22282E"/>
-                </a:solidFill>
-              </a:rPr>
-              <a:t>•  Sección de 1 página para la dirección: postura general de riesgo, hallazgos clave en lenguaje de negocio y recomendación estratégica. Característica clave: sin jerga técnica ni comandos.</a:t>
-            </a:r>
-          </a:p>
-          <a:p>
-            <a:pPr>
-              <a:spcAft>
-                <a:spcPts val="600"/>
-              </a:spcAft>
-            </a:pPr>
-            <a:r>
-              <a:rPr sz="1500">
-                <a:solidFill>
-                  <a:srgbClr val="22282E"/>
-                </a:solidFill>
-              </a:rPr>
-              <a:t>•  CVSS (Common Vulnerability Scoring System)</a:t>
-            </a:r>
-          </a:p>
-          <a:p>
-            <a:pPr>
-              <a:spcAft>
-                <a:spcPts val="600"/>
-              </a:spcAft>
-            </a:pPr>
-            <a:r>
-              <a:rPr sz="1500">
-                <a:solidFill>
-                  <a:srgbClr val="22282E"/>
-                </a:solidFill>
-              </a:rPr>
-              <a:t>•  Estándar de la FIRST para puntuar la severidad (0–10). Da una base objetiva, pero debe ajustarse con el contexto (exposición real, valor del activo, controles compensatorios).</a:t>
-            </a:r>
-          </a:p>
-          <a:p>
-            <a:pPr>
-              <a:spcAft>
-                <a:spcPts val="600"/>
-              </a:spcAft>
-            </a:pPr>
-            <a:r>
-              <a:rPr sz="1500">
-                <a:solidFill>
-                  <a:srgbClr val="22282E"/>
-                </a:solidFill>
-              </a:rPr>
-              <a:t>•  Hallazgo (finding)</a:t>
-            </a:r>
-          </a:p>
-          <a:p>
-            <a:pPr>
-              <a:spcAft>
-                <a:spcPts val="600"/>
-              </a:spcAft>
-            </a:pPr>
-            <a:r>
-              <a:rPr sz="1500">
-                <a:solidFill>
-                  <a:srgbClr val="22282E"/>
-                </a:solidFill>
-              </a:rPr>
-              <a:t>•  Unidad del informe que describe una debilidad concreta. Característica clave: es autocontenido — se entiende sin leer el resto del documento.</a:t>
-            </a:r>
-          </a:p>
-          <a:p>
-            <a:pPr>
-              <a:spcAft>
-                <a:spcPts val="600"/>
-              </a:spcAft>
-            </a:pPr>
-            <a:r>
-              <a:rPr sz="1500">
-                <a:solidFill>
-                  <a:srgbClr val="22282E"/>
-                </a:solidFill>
-              </a:rPr>
-              <a:t>•  Evidencia reproducible</a:t>
+              <a:t>•  Un pentester profesional no vende accesos: vende un informe. Todo lo anterior —el recon,</a:t>
+            </a:r>
+          </a:p>
+          <a:p>
+            <a:pPr>
+              <a:spcAft>
+                <a:spcPts val="600"/>
+              </a:spcAft>
+            </a:pPr>
+            <a:r>
+              <a:rPr sz="1500">
+                <a:solidFill>
+                  <a:srgbClr val="22282E"/>
+                </a:solidFill>
+              </a:rPr>
+              <a:t>•  la explotación, la escalada, el pivoting— es materia prima que solo adquiere valor cuando se</a:t>
+            </a:r>
+          </a:p>
+          <a:p>
+            <a:pPr>
+              <a:spcAft>
+                <a:spcPts val="600"/>
+              </a:spcAft>
+            </a:pPr>
+            <a:r>
+              <a:rPr sz="1500">
+                <a:solidFill>
+                  <a:srgbClr val="22282E"/>
+                </a:solidFill>
+              </a:rPr>
+              <a:t>•  convierte en un documento que el cliente puede usar para reducir su riesgo. Un acceso a</a:t>
+            </a:r>
+          </a:p>
+          <a:p>
+            <a:pPr>
+              <a:spcAft>
+                <a:spcPts val="600"/>
+              </a:spcAft>
+            </a:pPr>
+            <a:r>
+              <a:rPr sz="1500">
+                <a:solidFill>
+                  <a:srgbClr val="22282E"/>
+                </a:solidFill>
+              </a:rPr>
+              <a:t>•  Domain Admin perfectamente logrado pero mal documentado no vale nada; un hallazgo medio bien</a:t>
+            </a:r>
+          </a:p>
+          <a:p>
+            <a:pPr>
+              <a:spcAft>
+                <a:spcPts val="600"/>
+              </a:spcAft>
+            </a:pPr>
+            <a:r>
+              <a:rPr sz="1500">
+                <a:solidFill>
+                  <a:srgbClr val="22282E"/>
+                </a:solidFill>
+              </a:rPr>
+              <a:t>•  explicado, con su evidencia y su remediación, sí. Esta es la clase que cierra la parte porque</a:t>
+            </a:r>
+          </a:p>
+          <a:p>
+            <a:pPr>
+              <a:spcAft>
+                <a:spcPts val="600"/>
+              </a:spcAft>
+            </a:pPr>
+            <a:r>
+              <a:rPr sz="1500">
+                <a:solidFill>
+                  <a:srgbClr val="22282E"/>
+                </a:solidFill>
+              </a:rPr>
+              <a:t>•  es donde el trabajo se transforma en resultado, y donde muchos técnicos brillantes fallan.</a:t>
+            </a:r>
+          </a:p>
+          <a:p>
+            <a:pPr>
+              <a:spcAft>
+                <a:spcPts val="600"/>
+              </a:spcAft>
+            </a:pPr>
+            <a:r>
+              <a:rPr sz="1500">
+                <a:solidFill>
+                  <a:srgbClr val="22282E"/>
+                </a:solidFill>
+              </a:rPr>
+              <a:t>•  La clave que organiza todo el informe es que tiene lectores distintos con necesidades</a:t>
             </a:r>
           </a:p>
         </p:txBody>
@@ -4286,7 +4617,7 @@
                   <a:srgbClr val="0B3D2E"/>
                 </a:solidFill>
               </a:rPr>
-              <a:t>🧰 Herramientas y preparación</a:t>
+              <a:t>📖 Definiciones y características</a:t>
             </a:r>
           </a:p>
         </p:txBody>
@@ -4324,7 +4655,97 @@
                   <a:srgbClr val="22282E"/>
                 </a:solidFill>
               </a:rPr>
-              <a:t>•  Una plantilla de informe (Markdown/LaTeX/Word), un sistema para gestionar hallazgos (incluso una hoja de cálculo con CVSS), la calculadora CVSS de FIRST y las capturas/logs recopilados durante el engagement. Opcional: herramientas de reporting como Dradis o PlexTrac para equipos.</a:t>
+              <a:t>•  Resumen ejecutivo</a:t>
+            </a:r>
+          </a:p>
+          <a:p>
+            <a:pPr>
+              <a:spcAft>
+                <a:spcPts val="600"/>
+              </a:spcAft>
+            </a:pPr>
+            <a:r>
+              <a:rPr sz="1500">
+                <a:solidFill>
+                  <a:srgbClr val="22282E"/>
+                </a:solidFill>
+              </a:rPr>
+              <a:t>•  Sección de 1 página para la dirección: postura general de riesgo, hallazgos clave en lenguaje de negocio y recomendación estratégica. Característica clave: sin jerga técnica ni comandos.</a:t>
+            </a:r>
+          </a:p>
+          <a:p>
+            <a:pPr>
+              <a:spcAft>
+                <a:spcPts val="600"/>
+              </a:spcAft>
+            </a:pPr>
+            <a:r>
+              <a:rPr sz="1500">
+                <a:solidFill>
+                  <a:srgbClr val="22282E"/>
+                </a:solidFill>
+              </a:rPr>
+              <a:t>•  CVSS (Common Vulnerability Scoring System)</a:t>
+            </a:r>
+          </a:p>
+          <a:p>
+            <a:pPr>
+              <a:spcAft>
+                <a:spcPts val="600"/>
+              </a:spcAft>
+            </a:pPr>
+            <a:r>
+              <a:rPr sz="1500">
+                <a:solidFill>
+                  <a:srgbClr val="22282E"/>
+                </a:solidFill>
+              </a:rPr>
+              <a:t>•  Estándar de la FIRST para puntuar la severidad (0–10). Da una base objetiva, pero debe ajustarse con el contexto (exposición real, valor del activo, controles compensatorios).</a:t>
+            </a:r>
+          </a:p>
+          <a:p>
+            <a:pPr>
+              <a:spcAft>
+                <a:spcPts val="600"/>
+              </a:spcAft>
+            </a:pPr>
+            <a:r>
+              <a:rPr sz="1500">
+                <a:solidFill>
+                  <a:srgbClr val="22282E"/>
+                </a:solidFill>
+              </a:rPr>
+              <a:t>•  Hallazgo (finding)</a:t>
+            </a:r>
+          </a:p>
+          <a:p>
+            <a:pPr>
+              <a:spcAft>
+                <a:spcPts val="600"/>
+              </a:spcAft>
+            </a:pPr>
+            <a:r>
+              <a:rPr sz="1500">
+                <a:solidFill>
+                  <a:srgbClr val="22282E"/>
+                </a:solidFill>
+              </a:rPr>
+              <a:t>•  Unidad del informe que describe una debilidad concreta. Característica clave: es autocontenido — se entiende sin leer el resto del documento.</a:t>
+            </a:r>
+          </a:p>
+          <a:p>
+            <a:pPr>
+              <a:spcAft>
+                <a:spcPts val="600"/>
+              </a:spcAft>
+            </a:pPr>
+            <a:r>
+              <a:rPr sz="1500">
+                <a:solidFill>
+                  <a:srgbClr val="22282E"/>
+                </a:solidFill>
+              </a:rPr>
+              <a:t>•  Evidencia reproducible</a:t>
             </a:r>
           </a:p>
         </p:txBody>
@@ -4375,7 +4796,7 @@
                   <a:srgbClr val="0B3D2E"/>
                 </a:solidFill>
               </a:rPr>
-              <a:t>🧪 Laboratorio guiado</a:t>
+              <a:t>📔 Glosario</a:t>
             </a:r>
           </a:p>
         </p:txBody>
@@ -4413,97 +4834,97 @@
                   <a:srgbClr val="22282E"/>
                 </a:solidFill>
               </a:rPr>
-              <a:t>•  Redacta el resumen ejecutivo. Una página, sin jerga: ¿cuál es el riesgo para el negocio? ¿qué tres cosas debe hacer la dirección?</a:t>
-            </a:r>
-          </a:p>
-          <a:p>
-            <a:pPr>
-              <a:spcAft>
-                <a:spcPts val="600"/>
-              </a:spcAft>
-            </a:pPr>
-            <a:r>
-              <a:rPr sz="1500">
-                <a:solidFill>
-                  <a:srgbClr val="22282E"/>
-                </a:solidFill>
-              </a:rPr>
-              <a:t>•  Describe la metodología. Alcance, ventana temporal, enfoque (caja negra/gris/blanca), limitaciones.</a:t>
-            </a:r>
-          </a:p>
-          <a:p>
-            <a:pPr>
-              <a:spcAft>
-                <a:spcPts val="600"/>
-              </a:spcAft>
-            </a:pPr>
-            <a:r>
-              <a:rPr sz="1500">
-                <a:solidFill>
-                  <a:srgbClr val="22282E"/>
-                </a:solidFill>
-              </a:rPr>
-              <a:t>•  Documenta un hallazgo completo usando esta estructura:</a:t>
-            </a:r>
-          </a:p>
-          <a:p>
-            <a:pPr>
-              <a:spcAft>
-                <a:spcPts val="600"/>
-              </a:spcAft>
-            </a:pPr>
-            <a:r>
-              <a:rPr sz="1500">
-                <a:solidFill>
-                  <a:srgbClr val="22282E"/>
-                </a:solidFill>
-              </a:rPr>
-              <a:t>•  Título claro (p. ej. "Inyección SQL en el login permite acceso no autenticado").</a:t>
-            </a:r>
-          </a:p>
-          <a:p>
-            <a:pPr>
-              <a:spcAft>
-                <a:spcPts val="600"/>
-              </a:spcAft>
-            </a:pPr>
-            <a:r>
-              <a:rPr sz="1500">
-                <a:solidFill>
-                  <a:srgbClr val="22282E"/>
-                </a:solidFill>
-              </a:rPr>
-              <a:t>•  Severidad: calcula el vector CVSS y ajústalo (¿el activo es crítico? ¿está expuesto a internet?).</a:t>
-            </a:r>
-          </a:p>
-          <a:p>
-            <a:pPr>
-              <a:spcAft>
-                <a:spcPts val="600"/>
-              </a:spcAft>
-            </a:pPr>
-            <a:r>
-              <a:rPr sz="1500">
-                <a:solidFill>
-                  <a:srgbClr val="22282E"/>
-                </a:solidFill>
-              </a:rPr>
-              <a:t>•  Impacto de negocio: qué pasaría si se explota (fuga de datos de clientes, etc.).</a:t>
-            </a:r>
-          </a:p>
-          <a:p>
-            <a:pPr>
-              <a:spcAft>
-                <a:spcPts val="600"/>
-              </a:spcAft>
-            </a:pPr>
-            <a:r>
-              <a:rPr sz="1500">
-                <a:solidFill>
-                  <a:srgbClr val="22282E"/>
-                </a:solidFill>
-              </a:rPr>
-              <a:t>•  Evidencia reproducible: petición/comando exacto + captura legible.</a:t>
+              <a:t>•  Término — Definición concisa</a:t>
+            </a:r>
+          </a:p>
+          <a:p>
+            <a:pPr>
+              <a:spcAft>
+                <a:spcPts val="600"/>
+              </a:spcAft>
+            </a:pPr>
+            <a:r>
+              <a:rPr sz="1500">
+                <a:solidFill>
+                  <a:srgbClr val="22282E"/>
+                </a:solidFill>
+              </a:rPr>
+              <a:t>•  Informe — El producto real del pentest; lo que el cliente compra</a:t>
+            </a:r>
+          </a:p>
+          <a:p>
+            <a:pPr>
+              <a:spcAft>
+                <a:spcPts val="600"/>
+              </a:spcAft>
+            </a:pPr>
+            <a:r>
+              <a:rPr sz="1500">
+                <a:solidFill>
+                  <a:srgbClr val="22282E"/>
+                </a:solidFill>
+              </a:rPr>
+              <a:t>•  Resumen ejecutivo — Sección para la dirección; riesgo de negocio, sin jerga</a:t>
+            </a:r>
+          </a:p>
+          <a:p>
+            <a:pPr>
+              <a:spcAft>
+                <a:spcPts val="600"/>
+              </a:spcAft>
+            </a:pPr>
+            <a:r>
+              <a:rPr sz="1500">
+                <a:solidFill>
+                  <a:srgbClr val="22282E"/>
+                </a:solidFill>
+              </a:rPr>
+              <a:t>•  Cuerpo técnico — Sección para TI y desarrollo; hallazgos y remediación</a:t>
+            </a:r>
+          </a:p>
+          <a:p>
+            <a:pPr>
+              <a:spcAft>
+                <a:spcPts val="600"/>
+              </a:spcAft>
+            </a:pPr>
+            <a:r>
+              <a:rPr sz="1500">
+                <a:solidFill>
+                  <a:srgbClr val="22282E"/>
+                </a:solidFill>
+              </a:rPr>
+              <a:t>•  Riesgo de negocio — Impacto en dinero, reputación, cumplimiento, continuidad</a:t>
+            </a:r>
+          </a:p>
+          <a:p>
+            <a:pPr>
+              <a:spcAft>
+                <a:spcPts val="600"/>
+              </a:spcAft>
+            </a:pPr>
+            <a:r>
+              <a:rPr sz="1500">
+                <a:solidFill>
+                  <a:srgbClr val="22282E"/>
+                </a:solidFill>
+              </a:rPr>
+              <a:t>•  Hallazgo — Unidad del informe con estructura fija</a:t>
+            </a:r>
+          </a:p>
+          <a:p>
+            <a:pPr>
+              <a:spcAft>
+                <a:spcPts val="600"/>
+              </a:spcAft>
+            </a:pPr>
+            <a:r>
+              <a:rPr sz="1500">
+                <a:solidFill>
+                  <a:srgbClr val="22282E"/>
+                </a:solidFill>
+              </a:rPr>
+              <a:t>•  Puntuación de riesgo — CVSS combinado con el contexto de negocio</a:t>
             </a:r>
           </a:p>
         </p:txBody>
@@ -4554,7 +4975,7 @@
                   <a:srgbClr val="0B3D2E"/>
                 </a:solidFill>
               </a:rPr>
-              <a:t>✍️ Ejercicios</a:t>
+              <a:t>🧰 Herramientas y preparación</a:t>
             </a:r>
           </a:p>
         </p:txBody>
@@ -4592,67 +5013,7 @@
                   <a:srgbClr val="22282E"/>
                 </a:solidFill>
               </a:rPr>
-              <a:t>•  Escribe un resumen ejecutivo de 200 palabras para una audiencia no técnica a partir de 3 hallazgos.</a:t>
-            </a:r>
-          </a:p>
-          <a:p>
-            <a:pPr>
-              <a:spcAft>
-                <a:spcPts val="600"/>
-              </a:spcAft>
-            </a:pPr>
-            <a:r>
-              <a:rPr sz="1500">
-                <a:solidFill>
-                  <a:srgbClr val="22282E"/>
-                </a:solidFill>
-              </a:rPr>
-              <a:t>•  Calcula el CVSS v3.1 de una SQLi no autenticada expuesta a internet y justifica cada métrica.</a:t>
-            </a:r>
-          </a:p>
-          <a:p>
-            <a:pPr>
-              <a:spcAft>
-                <a:spcPts val="600"/>
-              </a:spcAft>
-            </a:pPr>
-            <a:r>
-              <a:rPr sz="1500">
-                <a:solidFill>
-                  <a:srgbClr val="22282E"/>
-                </a:solidFill>
-              </a:rPr>
-              <a:t>•  Reescribe una recomendación genérica ("mejorar la seguridad") en una accionable y específica.</a:t>
-            </a:r>
-          </a:p>
-          <a:p>
-            <a:pPr>
-              <a:spcAft>
-                <a:spcPts val="600"/>
-              </a:spcAft>
-            </a:pPr>
-            <a:r>
-              <a:rPr sz="1500">
-                <a:solidFill>
-                  <a:srgbClr val="22282E"/>
-                </a:solidFill>
-              </a:rPr>
-              <a:t>•  Toma una captura de pantalla de una prueba y anótala (resaltar el dato clave) para que sea autoexplicativa.</a:t>
-            </a:r>
-          </a:p>
-          <a:p>
-            <a:pPr>
-              <a:spcAft>
-                <a:spcPts val="600"/>
-              </a:spcAft>
-            </a:pPr>
-            <a:r>
-              <a:rPr sz="1500">
-                <a:solidFill>
-                  <a:srgbClr val="22282E"/>
-                </a:solidFill>
-              </a:rPr>
-              <a:t>•  Diseña la tabla resumen de hallazgos (título, severidad, estado) para la primera página técnica.</a:t>
+              <a:t>•  Una plantilla de informe (Markdown/LaTeX/Word), un sistema para gestionar hallazgos (incluso una hoja de cálculo con CVSS), la calculadora CVSS de FIRST y las capturas/logs recopilados durante el…</a:t>
             </a:r>
           </a:p>
         </p:txBody>
@@ -4703,7 +5064,7 @@
                   <a:srgbClr val="0B3D2E"/>
                 </a:solidFill>
               </a:rPr>
-              <a:t>📝 Reto verificable</a:t>
+              <a:t>🧪 Laboratorio guiado</a:t>
             </a:r>
           </a:p>
         </p:txBody>
@@ -4741,22 +5102,97 @@
                   <a:srgbClr val="22282E"/>
                 </a:solidFill>
               </a:rPr>
-              <a:t>•  Redacta un mini-informe (resumen ejecutivo + 2 hallazgos completos + tabla de priorización) sobre vulnerabilidades encontradas en tu propio laboratorio.</a:t>
-            </a:r>
-          </a:p>
-          <a:p>
-            <a:pPr>
-              <a:spcAft>
-                <a:spcPts val="600"/>
-              </a:spcAft>
-            </a:pPr>
-            <a:r>
-              <a:rPr sz="1500">
-                <a:solidFill>
-                  <a:srgbClr val="22282E"/>
-                </a:solidFill>
-              </a:rPr>
-              <a:t>•  Criterio de aceptación: el resumen ejecutivo no contiene jerga técnica; cada hallazgo tiene CVSS justificado, evidencia reproducible y remediación específica con referencia; la priorización considera contexto de negocio, no solo el número CVSS.</a:t>
+              <a:t>•  Redacta el resumen ejecutivo. Una página, sin jerga: ¿cuál es el riesgo para el negocio? ¿qué tres cosas debe hacer la dirección?</a:t>
+            </a:r>
+          </a:p>
+          <a:p>
+            <a:pPr>
+              <a:spcAft>
+                <a:spcPts val="600"/>
+              </a:spcAft>
+            </a:pPr>
+            <a:r>
+              <a:rPr sz="1500">
+                <a:solidFill>
+                  <a:srgbClr val="22282E"/>
+                </a:solidFill>
+              </a:rPr>
+              <a:t>•  Describe la metodología. Alcance, ventana temporal, enfoque (caja negra/gris/blanca), limitaciones.</a:t>
+            </a:r>
+          </a:p>
+          <a:p>
+            <a:pPr>
+              <a:spcAft>
+                <a:spcPts val="600"/>
+              </a:spcAft>
+            </a:pPr>
+            <a:r>
+              <a:rPr sz="1500">
+                <a:solidFill>
+                  <a:srgbClr val="22282E"/>
+                </a:solidFill>
+              </a:rPr>
+              <a:t>•  Documenta un hallazgo completo usando esta estructura:</a:t>
+            </a:r>
+          </a:p>
+          <a:p>
+            <a:pPr>
+              <a:spcAft>
+                <a:spcPts val="600"/>
+              </a:spcAft>
+            </a:pPr>
+            <a:r>
+              <a:rPr sz="1500">
+                <a:solidFill>
+                  <a:srgbClr val="22282E"/>
+                </a:solidFill>
+              </a:rPr>
+              <a:t>•  Título claro (p. ej. "Inyección SQL en el login permite acceso no autenticado").</a:t>
+            </a:r>
+          </a:p>
+          <a:p>
+            <a:pPr>
+              <a:spcAft>
+                <a:spcPts val="600"/>
+              </a:spcAft>
+            </a:pPr>
+            <a:r>
+              <a:rPr sz="1500">
+                <a:solidFill>
+                  <a:srgbClr val="22282E"/>
+                </a:solidFill>
+              </a:rPr>
+              <a:t>•  Severidad: calcula el vector CVSS y ajústalo (¿el activo es crítico? ¿está expuesto a internet?).</a:t>
+            </a:r>
+          </a:p>
+          <a:p>
+            <a:pPr>
+              <a:spcAft>
+                <a:spcPts val="600"/>
+              </a:spcAft>
+            </a:pPr>
+            <a:r>
+              <a:rPr sz="1500">
+                <a:solidFill>
+                  <a:srgbClr val="22282E"/>
+                </a:solidFill>
+              </a:rPr>
+              <a:t>•  Impacto de negocio: qué pasaría si se explota (fuga de datos de clientes, etc.).</a:t>
+            </a:r>
+          </a:p>
+          <a:p>
+            <a:pPr>
+              <a:spcAft>
+                <a:spcPts val="600"/>
+              </a:spcAft>
+            </a:pPr>
+            <a:r>
+              <a:rPr sz="1500">
+                <a:solidFill>
+                  <a:srgbClr val="22282E"/>
+                </a:solidFill>
+              </a:rPr>
+              <a:t>•  Evidencia reproducible: petición/comando exacto + captura legible.</a:t>
             </a:r>
           </a:p>
         </p:txBody>
